--- a/slides/04.pptx
+++ b/slides/04.pptx
@@ -363,7 +363,7 @@
           <a:p>
             <a:fld id="{9D1ABCF1-0A99-4848-8BB1-E328D89E26D6}" type="datetimeFigureOut">
               <a:rPr lang="en-JP" smtClean="0"/>
-              <a:t>2026/03/19</a:t>
+              <a:t>5/12/26</a:t>
             </a:fld>
             <a:endParaRPr lang="en-JP"/>
           </a:p>
@@ -778,7 +778,7 @@
           <a:p>
             <a:fld id="{FFF3EB5C-CA0B-3344-8184-E93D46154366}" type="datetime1">
               <a:rPr kumimoji="1" lang="en-US" altLang="ja-JP" smtClean="0"/>
-              <a:t>3/19/26</a:t>
+              <a:t>5/12/26</a:t>
             </a:fld>
             <a:endParaRPr kumimoji="1" lang="ja-JP" altLang="en-US"/>
           </a:p>
@@ -1008,7 +1008,7 @@
           <a:p>
             <a:fld id="{BA1AD2C2-955C-F649-BC40-40887635CDF9}" type="datetime1">
               <a:rPr kumimoji="1" lang="en-US" altLang="ja-JP" smtClean="0"/>
-              <a:t>3/19/26</a:t>
+              <a:t>5/12/26</a:t>
             </a:fld>
             <a:endParaRPr kumimoji="1" lang="ja-JP" altLang="en-US"/>
           </a:p>
@@ -1248,7 +1248,7 @@
           <a:p>
             <a:fld id="{0B380712-EF23-E940-8232-BCE0670E245E}" type="datetime1">
               <a:rPr kumimoji="1" lang="en-US" altLang="ja-JP" smtClean="0"/>
-              <a:t>3/19/26</a:t>
+              <a:t>5/12/26</a:t>
             </a:fld>
             <a:endParaRPr kumimoji="1" lang="ja-JP" altLang="en-US"/>
           </a:p>
@@ -1478,7 +1478,7 @@
           <a:p>
             <a:fld id="{C663C9DA-3D96-D44F-867D-090881F34D9C}" type="datetime1">
               <a:rPr kumimoji="1" lang="en-US" altLang="ja-JP" smtClean="0"/>
-              <a:t>3/19/26</a:t>
+              <a:t>5/12/26</a:t>
             </a:fld>
             <a:endParaRPr kumimoji="1" lang="ja-JP" altLang="en-US"/>
           </a:p>
@@ -1753,7 +1753,7 @@
           <a:p>
             <a:fld id="{BB57087B-A2D0-7946-AC0C-80A1F090A485}" type="datetime1">
               <a:rPr kumimoji="1" lang="en-US" altLang="ja-JP" smtClean="0"/>
-              <a:t>3/19/26</a:t>
+              <a:t>5/12/26</a:t>
             </a:fld>
             <a:endParaRPr kumimoji="1" lang="ja-JP" altLang="en-US"/>
           </a:p>
@@ -2082,7 +2082,7 @@
           <a:p>
             <a:fld id="{2D7FACB3-5722-B041-8152-F1186DF5E1D0}" type="datetime1">
               <a:rPr kumimoji="1" lang="en-US" altLang="ja-JP" smtClean="0"/>
-              <a:t>3/19/26</a:t>
+              <a:t>5/12/26</a:t>
             </a:fld>
             <a:endParaRPr kumimoji="1" lang="ja-JP" altLang="en-US"/>
           </a:p>
@@ -2558,7 +2558,7 @@
           <a:p>
             <a:fld id="{41CAB9FD-EB68-3442-B0E9-10D6810FB2D6}" type="datetime1">
               <a:rPr kumimoji="1" lang="en-US" altLang="ja-JP" smtClean="0"/>
-              <a:t>3/19/26</a:t>
+              <a:t>5/12/26</a:t>
             </a:fld>
             <a:endParaRPr kumimoji="1" lang="ja-JP" altLang="en-US"/>
           </a:p>
@@ -2699,7 +2699,7 @@
           <a:p>
             <a:fld id="{DC7CC904-FE74-DA45-BCF9-BCC4A9771C10}" type="datetime1">
               <a:rPr kumimoji="1" lang="en-US" altLang="ja-JP" smtClean="0"/>
-              <a:t>3/19/26</a:t>
+              <a:t>5/12/26</a:t>
             </a:fld>
             <a:endParaRPr kumimoji="1" lang="ja-JP" altLang="en-US"/>
           </a:p>
@@ -2812,7 +2812,7 @@
           <a:p>
             <a:fld id="{49E41295-5A6D-3347-8756-7643A4E0FBE8}" type="datetime1">
               <a:rPr kumimoji="1" lang="en-US" altLang="ja-JP" smtClean="0"/>
-              <a:t>3/19/26</a:t>
+              <a:t>5/12/26</a:t>
             </a:fld>
             <a:endParaRPr kumimoji="1" lang="ja-JP" altLang="en-US"/>
           </a:p>
@@ -3155,7 +3155,7 @@
           <a:p>
             <a:fld id="{16B97411-378C-1A47-AEA8-5EFA282AED65}" type="datetime1">
               <a:rPr kumimoji="1" lang="en-US" altLang="ja-JP" smtClean="0"/>
-              <a:t>3/19/26</a:t>
+              <a:t>5/12/26</a:t>
             </a:fld>
             <a:endParaRPr kumimoji="1" lang="ja-JP" altLang="en-US"/>
           </a:p>
@@ -3443,7 +3443,7 @@
           <a:p>
             <a:fld id="{C85CB5CA-5D49-F543-9D83-5105F0F8B880}" type="datetime1">
               <a:rPr kumimoji="1" lang="en-US" altLang="ja-JP" smtClean="0"/>
-              <a:t>3/19/26</a:t>
+              <a:t>5/12/26</a:t>
             </a:fld>
             <a:endParaRPr kumimoji="1" lang="ja-JP" altLang="en-US"/>
           </a:p>
@@ -3716,7 +3716,7 @@
           <a:p>
             <a:fld id="{F9BAA543-4692-5A4D-B2BB-061CE9A3CBB1}" type="datetime1">
               <a:rPr kumimoji="1" lang="en-US" altLang="ja-JP" smtClean="0"/>
-              <a:t>3/19/26</a:t>
+              <a:t>5/12/26</a:t>
             </a:fld>
             <a:endParaRPr kumimoji="1" lang="ja-JP" altLang="en-US"/>
           </a:p>
@@ -4181,31 +4181,6 @@
       </p:sp>
       <p:sp>
         <p:nvSpPr>
-          <p:cNvPr id="3" name="字幕 2">
-            <a:extLst>
-              <a:ext uri="{FF2B5EF4-FFF2-40B4-BE49-F238E27FC236}">
-                <a16:creationId xmlns:a16="http://schemas.microsoft.com/office/drawing/2014/main" id="{7164DE4E-4C1F-4538-DE90-18E6F669C376}"/>
-              </a:ext>
-            </a:extLst>
-          </p:cNvPr>
-          <p:cNvSpPr>
-            <a:spLocks noGrp="1"/>
-          </p:cNvSpPr>
-          <p:nvPr>
-            <p:ph type="subTitle" idx="1"/>
-          </p:nvPr>
-        </p:nvSpPr>
-        <p:spPr/>
-        <p:txBody>
-          <a:bodyPr/>
-          <a:lstStyle/>
-          <a:p>
-            <a:endParaRPr kumimoji="1" lang="ja-JP" altLang="en-US"/>
-          </a:p>
-        </p:txBody>
-      </p:sp>
-      <p:sp>
-        <p:nvSpPr>
           <p:cNvPr id="5" name="Slide Number Placeholder 4">
             <a:extLst>
               <a:ext uri="{FF2B5EF4-FFF2-40B4-BE49-F238E27FC236}">
@@ -4323,8 +4298,8 @@
           </a:prstGeom>
         </p:spPr>
       </p:pic>
-      <mc:AlternateContent xmlns:mc="http://schemas.openxmlformats.org/markup-compatibility/2006" xmlns:a14="http://schemas.microsoft.com/office/drawing/2010/main">
-        <mc:Choice Requires="a14">
+      <mc:AlternateContent xmlns:mc="http://schemas.openxmlformats.org/markup-compatibility/2006">
+        <mc:Choice xmlns:a14="http://schemas.microsoft.com/office/drawing/2010/main" Requires="a14">
           <p:sp>
             <p:nvSpPr>
               <p:cNvPr id="8" name="コンテンツ プレースホルダー 7">
@@ -4388,6 +4363,9 @@
                         <m:ctrlPr>
                           <a:rPr lang="ja-JP" altLang="ja-JP" i="1">
                             <a:effectLst/>
+                            <a:highlight>
+                              <a:srgbClr val="FF0000"/>
+                            </a:highlight>
                             <a:latin typeface="Cambria Math" panose="02040503050406030204" pitchFamily="18" charset="0"/>
                             <a:ea typeface="Cambria Math" panose="02040503050406030204" pitchFamily="18" charset="0"/>
                           </a:rPr>
@@ -4397,6 +4375,9 @@
                         <m:r>
                           <a:rPr lang="en-US" altLang="ja-JP" i="1">
                             <a:effectLst/>
+                            <a:highlight>
+                              <a:srgbClr val="FF0000"/>
+                            </a:highlight>
                             <a:latin typeface="Cambria Math" panose="02040503050406030204" pitchFamily="18" charset="0"/>
                             <a:ea typeface="ＭＳ 明朝" panose="02020609040205080304" pitchFamily="17" charset="-128"/>
                             <a:cs typeface="Times New Roman" panose="02020603050405020304" pitchFamily="18" charset="0"/>
@@ -4406,6 +4387,9 @@
                         <m:r>
                           <a:rPr lang="en-US" altLang="ja-JP" i="1">
                             <a:effectLst/>
+                            <a:highlight>
+                              <a:srgbClr val="FF0000"/>
+                            </a:highlight>
                             <a:latin typeface="Cambria Math" panose="02040503050406030204" pitchFamily="18" charset="0"/>
                             <a:ea typeface="ＭＳ 明朝" panose="02020609040205080304" pitchFamily="17" charset="-128"/>
                             <a:cs typeface="Times New Roman" panose="02020603050405020304" pitchFamily="18" charset="0"/>
@@ -4417,6 +4401,9 @@
                         <m:r>
                           <a:rPr lang="en-US" altLang="ja-JP" i="1">
                             <a:effectLst/>
+                            <a:highlight>
+                              <a:srgbClr val="FF0000"/>
+                            </a:highlight>
                             <a:latin typeface="Cambria Math" panose="02040503050406030204" pitchFamily="18" charset="0"/>
                             <a:ea typeface="ＭＳ 明朝" panose="02020609040205080304" pitchFamily="17" charset="-128"/>
                             <a:cs typeface="Times New Roman" panose="02020603050405020304" pitchFamily="18" charset="0"/>
@@ -4470,6 +4457,9 @@
                         <m:ctrlPr>
                           <a:rPr lang="ja-JP" altLang="ja-JP" i="1">
                             <a:effectLst/>
+                            <a:highlight>
+                              <a:srgbClr val="FFFF00"/>
+                            </a:highlight>
                             <a:latin typeface="Cambria Math" panose="02040503050406030204" pitchFamily="18" charset="0"/>
                             <a:ea typeface="Cambria Math" panose="02040503050406030204" pitchFamily="18" charset="0"/>
                           </a:rPr>
@@ -4479,6 +4469,9 @@
                         <m:r>
                           <a:rPr lang="en-US" altLang="ja-JP" i="1">
                             <a:effectLst/>
+                            <a:highlight>
+                              <a:srgbClr val="FFFF00"/>
+                            </a:highlight>
                             <a:latin typeface="Cambria Math" panose="02040503050406030204" pitchFamily="18" charset="0"/>
                             <a:ea typeface="ＭＳ 明朝" panose="02020609040205080304" pitchFamily="17" charset="-128"/>
                             <a:cs typeface="Times New Roman" panose="02020603050405020304" pitchFamily="18" charset="0"/>
@@ -4488,6 +4481,9 @@
                         <m:r>
                           <a:rPr lang="en-US" altLang="ja-JP" i="1">
                             <a:effectLst/>
+                            <a:highlight>
+                              <a:srgbClr val="FFFF00"/>
+                            </a:highlight>
                             <a:latin typeface="Cambria Math" panose="02040503050406030204" pitchFamily="18" charset="0"/>
                             <a:ea typeface="ＭＳ 明朝" panose="02020609040205080304" pitchFamily="17" charset="-128"/>
                             <a:cs typeface="Times New Roman" panose="02020603050405020304" pitchFamily="18" charset="0"/>
@@ -4499,6 +4495,9 @@
                         <m:r>
                           <a:rPr lang="en-US" altLang="ja-JP" i="1">
                             <a:effectLst/>
+                            <a:highlight>
+                              <a:srgbClr val="FFFF00"/>
+                            </a:highlight>
                             <a:latin typeface="Cambria Math" panose="02040503050406030204" pitchFamily="18" charset="0"/>
                             <a:ea typeface="ＭＳ 明朝" panose="02020609040205080304" pitchFamily="17" charset="-128"/>
                             <a:cs typeface="Times New Roman" panose="02020603050405020304" pitchFamily="18" charset="0"/>
@@ -4511,6 +4510,9 @@
                 </a14:m>
                 <a:endParaRPr lang="en-US" altLang="ja-JP" dirty="0">
                   <a:effectLst/>
+                  <a:highlight>
+                    <a:srgbClr val="FFFF00"/>
+                  </a:highlight>
                   <a:latin typeface="Century" panose="02040604050505020304" pitchFamily="18" charset="0"/>
                   <a:ea typeface="ＭＳ 明朝" panose="02020609040205080304" pitchFamily="17" charset="-128"/>
                   <a:cs typeface="Times New Roman" panose="02020603050405020304" pitchFamily="18" charset="0"/>
@@ -4528,6 +4530,9 @@
                         <m:ctrlPr>
                           <a:rPr lang="ja-JP" altLang="ja-JP" i="1" smtClean="0">
                             <a:effectLst/>
+                            <a:highlight>
+                              <a:srgbClr val="FF0000"/>
+                            </a:highlight>
                             <a:latin typeface="Cambria Math" panose="02040503050406030204" pitchFamily="18" charset="0"/>
                             <a:ea typeface="Cambria Math" panose="02040503050406030204" pitchFamily="18" charset="0"/>
                           </a:rPr>
@@ -4537,6 +4542,9 @@
                         <m:r>
                           <a:rPr lang="en-US" altLang="ja-JP" i="1">
                             <a:effectLst/>
+                            <a:highlight>
+                              <a:srgbClr val="FF0000"/>
+                            </a:highlight>
                             <a:latin typeface="Cambria Math" panose="02040503050406030204" pitchFamily="18" charset="0"/>
                             <a:ea typeface="ＭＳ 明朝" panose="02020609040205080304" pitchFamily="17" charset="-128"/>
                             <a:cs typeface="Times New Roman" panose="02020603050405020304" pitchFamily="18" charset="0"/>
@@ -4546,6 +4554,9 @@
                         <m:r>
                           <a:rPr lang="en-US" altLang="ja-JP" i="1">
                             <a:effectLst/>
+                            <a:highlight>
+                              <a:srgbClr val="FF0000"/>
+                            </a:highlight>
                             <a:latin typeface="Cambria Math" panose="02040503050406030204" pitchFamily="18" charset="0"/>
                             <a:ea typeface="ＭＳ 明朝" panose="02020609040205080304" pitchFamily="17" charset="-128"/>
                             <a:cs typeface="Times New Roman" panose="02020603050405020304" pitchFamily="18" charset="0"/>
@@ -4557,6 +4568,9 @@
                         <m:r>
                           <a:rPr lang="en-US" altLang="ja-JP" i="1">
                             <a:effectLst/>
+                            <a:highlight>
+                              <a:srgbClr val="FF0000"/>
+                            </a:highlight>
                             <a:latin typeface="Cambria Math" panose="02040503050406030204" pitchFamily="18" charset="0"/>
                             <a:ea typeface="ＭＳ 明朝" panose="02020609040205080304" pitchFamily="17" charset="-128"/>
                             <a:cs typeface="Times New Roman" panose="02020603050405020304" pitchFamily="18" charset="0"/>
@@ -4579,6 +4593,9 @@
                         <m:ctrlPr>
                           <a:rPr lang="ja-JP" altLang="ja-JP" i="1">
                             <a:effectLst/>
+                            <a:highlight>
+                              <a:srgbClr val="FFFF00"/>
+                            </a:highlight>
                             <a:latin typeface="Cambria Math" panose="02040503050406030204" pitchFamily="18" charset="0"/>
                             <a:ea typeface="Cambria Math" panose="02040503050406030204" pitchFamily="18" charset="0"/>
                           </a:rPr>
@@ -4588,6 +4605,9 @@
                         <m:r>
                           <a:rPr lang="en-US" altLang="ja-JP" i="1">
                             <a:effectLst/>
+                            <a:highlight>
+                              <a:srgbClr val="FFFF00"/>
+                            </a:highlight>
                             <a:latin typeface="Cambria Math" panose="02040503050406030204" pitchFamily="18" charset="0"/>
                             <a:ea typeface="ＭＳ 明朝" panose="02020609040205080304" pitchFamily="17" charset="-128"/>
                             <a:cs typeface="Times New Roman" panose="02020603050405020304" pitchFamily="18" charset="0"/>
@@ -4597,6 +4617,9 @@
                         <m:r>
                           <a:rPr lang="en-US" altLang="ja-JP" i="1">
                             <a:effectLst/>
+                            <a:highlight>
+                              <a:srgbClr val="FFFF00"/>
+                            </a:highlight>
                             <a:latin typeface="Cambria Math" panose="02040503050406030204" pitchFamily="18" charset="0"/>
                             <a:ea typeface="ＭＳ 明朝" panose="02020609040205080304" pitchFamily="17" charset="-128"/>
                             <a:cs typeface="Times New Roman" panose="02020603050405020304" pitchFamily="18" charset="0"/>
@@ -4608,6 +4631,9 @@
                         <m:r>
                           <a:rPr lang="en-US" altLang="ja-JP" i="1">
                             <a:effectLst/>
+                            <a:highlight>
+                              <a:srgbClr val="FFFF00"/>
+                            </a:highlight>
                             <a:latin typeface="Cambria Math" panose="02040503050406030204" pitchFamily="18" charset="0"/>
                             <a:ea typeface="ＭＳ 明朝" panose="02020609040205080304" pitchFamily="17" charset="-128"/>
                             <a:cs typeface="Times New Roman" panose="02020603050405020304" pitchFamily="18" charset="0"/>
@@ -4641,6 +4667,9 @@
                             <m:ctrlPr>
                               <a:rPr lang="ja-JP" altLang="ja-JP" i="1">
                                 <a:effectLst/>
+                                <a:highlight>
+                                  <a:srgbClr val="FF0000"/>
+                                </a:highlight>
                                 <a:latin typeface="Cambria Math" panose="02040503050406030204" pitchFamily="18" charset="0"/>
                                 <a:ea typeface="Cambria Math" panose="02040503050406030204" pitchFamily="18" charset="0"/>
                               </a:rPr>
@@ -4650,6 +4679,9 @@
                             <m:r>
                               <a:rPr lang="en-US" altLang="ja-JP" i="1">
                                 <a:effectLst/>
+                                <a:highlight>
+                                  <a:srgbClr val="FF0000"/>
+                                </a:highlight>
                                 <a:latin typeface="Cambria Math" panose="02040503050406030204" pitchFamily="18" charset="0"/>
                                 <a:ea typeface="ＭＳ 明朝" panose="02020609040205080304" pitchFamily="17" charset="-128"/>
                                 <a:cs typeface="Times New Roman" panose="02020603050405020304" pitchFamily="18" charset="0"/>
@@ -4661,6 +4693,9 @@
                             <m:r>
                               <a:rPr lang="en-US" altLang="ja-JP" i="1">
                                 <a:effectLst/>
+                                <a:highlight>
+                                  <a:srgbClr val="FF0000"/>
+                                </a:highlight>
                                 <a:latin typeface="Cambria Math" panose="02040503050406030204" pitchFamily="18" charset="0"/>
                                 <a:ea typeface="ＭＳ 明朝" panose="02020609040205080304" pitchFamily="17" charset="-128"/>
                                 <a:cs typeface="Times New Roman" panose="02020603050405020304" pitchFamily="18" charset="0"/>
@@ -4676,6 +4711,9 @@
                             <m:ctrlPr>
                               <a:rPr lang="ja-JP" altLang="ja-JP" i="1">
                                 <a:effectLst/>
+                                <a:highlight>
+                                  <a:srgbClr val="FFFF00"/>
+                                </a:highlight>
                                 <a:latin typeface="Cambria Math" panose="02040503050406030204" pitchFamily="18" charset="0"/>
                                 <a:ea typeface="Cambria Math" panose="02040503050406030204" pitchFamily="18" charset="0"/>
                               </a:rPr>
@@ -4685,6 +4723,9 @@
                             <m:r>
                               <a:rPr lang="en-US" altLang="ja-JP" i="1">
                                 <a:effectLst/>
+                                <a:highlight>
+                                  <a:srgbClr val="FFFF00"/>
+                                </a:highlight>
                                 <a:latin typeface="Cambria Math" panose="02040503050406030204" pitchFamily="18" charset="0"/>
                                 <a:ea typeface="ＭＳ 明朝" panose="02020609040205080304" pitchFamily="17" charset="-128"/>
                                 <a:cs typeface="Times New Roman" panose="02020603050405020304" pitchFamily="18" charset="0"/>
@@ -4696,6 +4737,9 @@
                             <m:r>
                               <a:rPr lang="en-US" altLang="ja-JP" i="1">
                                 <a:effectLst/>
+                                <a:highlight>
+                                  <a:srgbClr val="FFFF00"/>
+                                </a:highlight>
                                 <a:latin typeface="Cambria Math" panose="02040503050406030204" pitchFamily="18" charset="0"/>
                                 <a:ea typeface="ＭＳ 明朝" panose="02020609040205080304" pitchFamily="17" charset="-128"/>
                                 <a:cs typeface="Times New Roman" panose="02020603050405020304" pitchFamily="18" charset="0"/>
@@ -4757,7 +4801,19 @@
                     <a:ea typeface="ＭＳ 明朝" panose="02020609040205080304" pitchFamily="17" charset="-128"/>
                     <a:cs typeface="Times New Roman" panose="02020603050405020304" pitchFamily="18" charset="0"/>
                   </a:rPr>
-                  <a:t>の時リンゴ</a:t>
+                  <a:t>の時</a:t>
+                </a:r>
+                <a:r>
+                  <a:rPr lang="ja-JP" altLang="en-US">
+                    <a:effectLst/>
+                    <a:highlight>
+                      <a:srgbClr val="FF0000"/>
+                    </a:highlight>
+                    <a:latin typeface="Century" panose="02040604050505020304" pitchFamily="18" charset="0"/>
+                    <a:ea typeface="ＭＳ 明朝" panose="02020609040205080304" pitchFamily="17" charset="-128"/>
+                    <a:cs typeface="Times New Roman" panose="02020603050405020304" pitchFamily="18" charset="0"/>
+                  </a:rPr>
+                  <a:t>リンゴ</a:t>
                 </a:r>
                 <a:r>
                   <a:rPr lang="ja-JP" altLang="ja-JP">
@@ -4937,6 +4993,9 @@
                 <a:r>
                   <a:rPr lang="ja-JP" altLang="en-US">
                     <a:effectLst/>
+                    <a:highlight>
+                      <a:srgbClr val="FFFF00"/>
+                    </a:highlight>
                     <a:latin typeface="Century" panose="02040604050505020304" pitchFamily="18" charset="0"/>
                     <a:ea typeface="ＭＳ 明朝" panose="02020609040205080304" pitchFamily="17" charset="-128"/>
                     <a:cs typeface="Times New Roman" panose="02020603050405020304" pitchFamily="18" charset="0"/>
@@ -5370,6 +5429,9 @@
                     <m:r>
                       <a:rPr lang="en-US" altLang="ja-JP" i="1">
                         <a:effectLst/>
+                        <a:highlight>
+                          <a:srgbClr val="00FFFF"/>
+                        </a:highlight>
                         <a:latin typeface="Cambria Math" panose="02040503050406030204" pitchFamily="18" charset="0"/>
                         <a:ea typeface="ＭＳ 明朝" panose="02020609040205080304" pitchFamily="17" charset="-128"/>
                         <a:cs typeface="Times New Roman" panose="02020603050405020304" pitchFamily="18" charset="0"/>
@@ -5425,7 +5487,7 @@
             </p:txBody>
           </p:sp>
         </mc:Choice>
-        <mc:Fallback xmlns="">
+        <mc:Fallback>
           <p:sp>
             <p:nvSpPr>
               <p:cNvPr id="8" name="コンテンツ プレースホルダー 7">
@@ -5459,7 +5521,7 @@
               <a:lstStyle/>
               <a:p>
                 <a:r>
-                  <a:rPr lang="en-JP">
+                  <a:rPr lang="ja-JP" altLang="en-US">
                     <a:noFill/>
                   </a:rPr>
                   <a:t> </a:t>
@@ -5732,8 +5794,8 @@
           </a:prstGeom>
         </p:spPr>
       </p:pic>
-      <mc:AlternateContent xmlns:mc="http://schemas.openxmlformats.org/markup-compatibility/2006" xmlns:a14="http://schemas.microsoft.com/office/drawing/2010/main">
-        <mc:Choice Requires="a14">
+      <mc:AlternateContent xmlns:mc="http://schemas.openxmlformats.org/markup-compatibility/2006">
+        <mc:Choice xmlns:a14="http://schemas.microsoft.com/office/drawing/2010/main" Requires="a14">
           <p:sp>
             <p:nvSpPr>
               <p:cNvPr id="3" name="コンテンツ プレースホルダー 2">
@@ -5809,6 +5871,9 @@
                 <a:r>
                   <a:rPr lang="ja-JP" altLang="en-US" sz="2400" dirty="0">
                     <a:effectLst/>
+                    <a:highlight>
+                      <a:srgbClr val="FFFF00"/>
+                    </a:highlight>
                     <a:latin typeface="Century" panose="02040604050505020304" pitchFamily="18" charset="0"/>
                     <a:ea typeface="ＭＳ 明朝" panose="02020609040205080304" pitchFamily="17" charset="-128"/>
                     <a:cs typeface="Times New Roman" panose="02020603050405020304" pitchFamily="18" charset="0"/>
@@ -5822,6 +5887,9 @@
                         <m:ctrlPr>
                           <a:rPr lang="ja-JP" altLang="ja-JP" sz="3600" i="1">
                             <a:effectLst/>
+                            <a:highlight>
+                              <a:srgbClr val="FFFF00"/>
+                            </a:highlight>
                             <a:latin typeface="Cambria Math" panose="02040503050406030204" pitchFamily="18" charset="0"/>
                             <a:ea typeface="Cambria Math" panose="02040503050406030204" pitchFamily="18" charset="0"/>
                           </a:rPr>
@@ -5833,6 +5901,9 @@
                             <m:ctrlPr>
                               <a:rPr lang="ja-JP" altLang="ja-JP" sz="3600" i="1">
                                 <a:effectLst/>
+                                <a:highlight>
+                                  <a:srgbClr val="FFFF00"/>
+                                </a:highlight>
                                 <a:latin typeface="Cambria Math" panose="02040503050406030204" pitchFamily="18" charset="0"/>
                                 <a:ea typeface="Cambria Math" panose="02040503050406030204" pitchFamily="18" charset="0"/>
                               </a:rPr>
@@ -5842,6 +5913,9 @@
                             <m:r>
                               <a:rPr lang="en-US" altLang="ja-JP" sz="2400" i="1">
                                 <a:effectLst/>
+                                <a:highlight>
+                                  <a:srgbClr val="FFFF00"/>
+                                </a:highlight>
                                 <a:latin typeface="Cambria Math" panose="02040503050406030204" pitchFamily="18" charset="0"/>
                                 <a:ea typeface="ＭＳ 明朝" panose="02020609040205080304" pitchFamily="17" charset="-128"/>
                                 <a:cs typeface="Times New Roman" panose="02020603050405020304" pitchFamily="18" charset="0"/>
@@ -5853,6 +5927,9 @@
                             <m:r>
                               <a:rPr lang="en-US" altLang="ja-JP" sz="2400" i="1">
                                 <a:effectLst/>
+                                <a:highlight>
+                                  <a:srgbClr val="FFFF00"/>
+                                </a:highlight>
                                 <a:latin typeface="Cambria Math" panose="02040503050406030204" pitchFamily="18" charset="0"/>
                                 <a:ea typeface="ＭＳ 明朝" panose="02020609040205080304" pitchFamily="17" charset="-128"/>
                                 <a:cs typeface="Times New Roman" panose="02020603050405020304" pitchFamily="18" charset="0"/>
@@ -5868,6 +5945,9 @@
                             <m:ctrlPr>
                               <a:rPr lang="ja-JP" altLang="ja-JP" sz="3600" i="1">
                                 <a:effectLst/>
+                                <a:highlight>
+                                  <a:srgbClr val="FFFF00"/>
+                                </a:highlight>
                                 <a:latin typeface="Cambria Math" panose="02040503050406030204" pitchFamily="18" charset="0"/>
                                 <a:ea typeface="Cambria Math" panose="02040503050406030204" pitchFamily="18" charset="0"/>
                               </a:rPr>
@@ -5877,6 +5957,9 @@
                             <m:r>
                               <a:rPr lang="en-US" altLang="ja-JP" sz="2400" i="1">
                                 <a:effectLst/>
+                                <a:highlight>
+                                  <a:srgbClr val="FFFF00"/>
+                                </a:highlight>
                                 <a:latin typeface="Cambria Math" panose="02040503050406030204" pitchFamily="18" charset="0"/>
                                 <a:ea typeface="ＭＳ 明朝" panose="02020609040205080304" pitchFamily="17" charset="-128"/>
                                 <a:cs typeface="Times New Roman" panose="02020603050405020304" pitchFamily="18" charset="0"/>
@@ -5888,6 +5971,9 @@
                             <m:r>
                               <a:rPr lang="en-US" altLang="ja-JP" sz="2400" i="1">
                                 <a:effectLst/>
+                                <a:highlight>
+                                  <a:srgbClr val="FFFF00"/>
+                                </a:highlight>
                                 <a:latin typeface="Cambria Math" panose="02040503050406030204" pitchFamily="18" charset="0"/>
                                 <a:ea typeface="ＭＳ 明朝" panose="02020609040205080304" pitchFamily="17" charset="-128"/>
                                 <a:cs typeface="Times New Roman" panose="02020603050405020304" pitchFamily="18" charset="0"/>
@@ -5901,6 +5987,9 @@
                     <m:r>
                       <a:rPr lang="en-US" altLang="ja-JP" sz="2400" i="1">
                         <a:effectLst/>
+                        <a:highlight>
+                          <a:srgbClr val="FFFF00"/>
+                        </a:highlight>
                         <a:latin typeface="Cambria Math" panose="02040503050406030204" pitchFamily="18" charset="0"/>
                         <a:ea typeface="ＭＳ 明朝" panose="02020609040205080304" pitchFamily="17" charset="-128"/>
                         <a:cs typeface="Times New Roman" panose="02020603050405020304" pitchFamily="18" charset="0"/>
@@ -5912,6 +6001,9 @@
                         <m:ctrlPr>
                           <a:rPr lang="ja-JP" altLang="ja-JP" sz="3600" i="1">
                             <a:effectLst/>
+                            <a:highlight>
+                              <a:srgbClr val="FFFF00"/>
+                            </a:highlight>
                             <a:latin typeface="Cambria Math" panose="02040503050406030204" pitchFamily="18" charset="0"/>
                             <a:ea typeface="Cambria Math" panose="02040503050406030204" pitchFamily="18" charset="0"/>
                           </a:rPr>
@@ -5921,6 +6013,9 @@
                         <m:r>
                           <a:rPr lang="en-US" altLang="ja-JP" sz="2400" i="1">
                             <a:effectLst/>
+                            <a:highlight>
+                              <a:srgbClr val="FFFF00"/>
+                            </a:highlight>
                             <a:latin typeface="Cambria Math" panose="02040503050406030204" pitchFamily="18" charset="0"/>
                             <a:ea typeface="ＭＳ 明朝" panose="02020609040205080304" pitchFamily="17" charset="-128"/>
                             <a:cs typeface="Times New Roman" panose="02020603050405020304" pitchFamily="18" charset="0"/>
@@ -5932,6 +6027,9 @@
                         <m:r>
                           <a:rPr lang="en-US" altLang="ja-JP" sz="2400" i="1">
                             <a:effectLst/>
+                            <a:highlight>
+                              <a:srgbClr val="FFFF00"/>
+                            </a:highlight>
                             <a:latin typeface="Cambria Math" panose="02040503050406030204" pitchFamily="18" charset="0"/>
                             <a:ea typeface="ＭＳ 明朝" panose="02020609040205080304" pitchFamily="17" charset="-128"/>
                             <a:cs typeface="Times New Roman" panose="02020603050405020304" pitchFamily="18" charset="0"/>
@@ -5954,6 +6052,9 @@
                 <a:r>
                   <a:rPr lang="ja-JP" altLang="en-US" sz="2400" dirty="0">
                     <a:effectLst/>
+                    <a:highlight>
+                      <a:srgbClr val="00FFFF"/>
+                    </a:highlight>
                     <a:latin typeface="Century" panose="02040604050505020304" pitchFamily="18" charset="0"/>
                     <a:ea typeface="ＭＳ 明朝" panose="02020609040205080304" pitchFamily="17" charset="-128"/>
                     <a:cs typeface="Times New Roman" panose="02020603050405020304" pitchFamily="18" charset="0"/>
@@ -5963,6 +6064,9 @@
                 <a:r>
                   <a:rPr lang="ja-JP" altLang="ja-JP" sz="2400" dirty="0">
                     <a:effectLst/>
+                    <a:highlight>
+                      <a:srgbClr val="00FFFF"/>
+                    </a:highlight>
                     <a:latin typeface="Century" panose="02040604050505020304" pitchFamily="18" charset="0"/>
                     <a:ea typeface="ＭＳ 明朝" panose="02020609040205080304" pitchFamily="17" charset="-128"/>
                     <a:cs typeface="Times New Roman" panose="02020603050405020304" pitchFamily="18" charset="0"/>
@@ -5976,6 +6080,9 @@
                         <m:ctrlPr>
                           <a:rPr lang="ja-JP" altLang="ja-JP" sz="3600" i="1">
                             <a:effectLst/>
+                            <a:highlight>
+                              <a:srgbClr val="00FFFF"/>
+                            </a:highlight>
                             <a:latin typeface="Cambria Math" panose="02040503050406030204" pitchFamily="18" charset="0"/>
                             <a:ea typeface="Cambria Math" panose="02040503050406030204" pitchFamily="18" charset="0"/>
                           </a:rPr>
@@ -5987,6 +6094,9 @@
                             <m:ctrlPr>
                               <a:rPr lang="ja-JP" altLang="ja-JP" sz="3600" i="1">
                                 <a:effectLst/>
+                                <a:highlight>
+                                  <a:srgbClr val="00FFFF"/>
+                                </a:highlight>
                                 <a:latin typeface="Cambria Math" panose="02040503050406030204" pitchFamily="18" charset="0"/>
                                 <a:ea typeface="Cambria Math" panose="02040503050406030204" pitchFamily="18" charset="0"/>
                               </a:rPr>
@@ -5996,6 +6106,9 @@
                             <m:r>
                               <a:rPr lang="en-US" altLang="ja-JP" sz="2400" i="1">
                                 <a:effectLst/>
+                                <a:highlight>
+                                  <a:srgbClr val="00FFFF"/>
+                                </a:highlight>
                                 <a:latin typeface="Cambria Math" panose="02040503050406030204" pitchFamily="18" charset="0"/>
                                 <a:ea typeface="ＭＳ 明朝" panose="02020609040205080304" pitchFamily="17" charset="-128"/>
                                 <a:cs typeface="Times New Roman" panose="02020603050405020304" pitchFamily="18" charset="0"/>
@@ -6007,6 +6120,9 @@
                             <m:r>
                               <a:rPr lang="en-US" altLang="ja-JP" sz="2400" i="1">
                                 <a:effectLst/>
+                                <a:highlight>
+                                  <a:srgbClr val="00FFFF"/>
+                                </a:highlight>
                                 <a:latin typeface="Cambria Math" panose="02040503050406030204" pitchFamily="18" charset="0"/>
                                 <a:ea typeface="ＭＳ 明朝" panose="02020609040205080304" pitchFamily="17" charset="-128"/>
                                 <a:cs typeface="Times New Roman" panose="02020603050405020304" pitchFamily="18" charset="0"/>
@@ -6018,6 +6134,9 @@
                             <m:r>
                               <a:rPr lang="en-US" altLang="ja-JP" sz="2400" i="1">
                                 <a:effectLst/>
+                                <a:highlight>
+                                  <a:srgbClr val="00FFFF"/>
+                                </a:highlight>
                                 <a:latin typeface="Cambria Math" panose="02040503050406030204" pitchFamily="18" charset="0"/>
                                 <a:ea typeface="ＭＳ 明朝" panose="02020609040205080304" pitchFamily="17" charset="-128"/>
                                 <a:cs typeface="Times New Roman" panose="02020603050405020304" pitchFamily="18" charset="0"/>
@@ -6033,6 +6152,9 @@
                             <m:ctrlPr>
                               <a:rPr lang="ja-JP" altLang="ja-JP" sz="3600" i="1">
                                 <a:effectLst/>
+                                <a:highlight>
+                                  <a:srgbClr val="00FFFF"/>
+                                </a:highlight>
                                 <a:latin typeface="Cambria Math" panose="02040503050406030204" pitchFamily="18" charset="0"/>
                                 <a:ea typeface="Cambria Math" panose="02040503050406030204" pitchFamily="18" charset="0"/>
                               </a:rPr>
@@ -6042,6 +6164,9 @@
                             <m:r>
                               <a:rPr lang="en-US" altLang="ja-JP" sz="2400" i="1">
                                 <a:effectLst/>
+                                <a:highlight>
+                                  <a:srgbClr val="00FFFF"/>
+                                </a:highlight>
                                 <a:latin typeface="Cambria Math" panose="02040503050406030204" pitchFamily="18" charset="0"/>
                                 <a:ea typeface="ＭＳ 明朝" panose="02020609040205080304" pitchFamily="17" charset="-128"/>
                                 <a:cs typeface="Times New Roman" panose="02020603050405020304" pitchFamily="18" charset="0"/>
@@ -6053,6 +6178,9 @@
                             <m:r>
                               <a:rPr lang="en-US" altLang="ja-JP" sz="2400" i="1">
                                 <a:effectLst/>
+                                <a:highlight>
+                                  <a:srgbClr val="00FFFF"/>
+                                </a:highlight>
                                 <a:latin typeface="Cambria Math" panose="02040503050406030204" pitchFamily="18" charset="0"/>
                                 <a:ea typeface="ＭＳ 明朝" panose="02020609040205080304" pitchFamily="17" charset="-128"/>
                                 <a:cs typeface="Times New Roman" panose="02020603050405020304" pitchFamily="18" charset="0"/>
@@ -6064,6 +6192,9 @@
                             <m:r>
                               <a:rPr lang="en-US" altLang="ja-JP" sz="2400" i="1">
                                 <a:effectLst/>
+                                <a:highlight>
+                                  <a:srgbClr val="00FFFF"/>
+                                </a:highlight>
                                 <a:latin typeface="Cambria Math" panose="02040503050406030204" pitchFamily="18" charset="0"/>
                                 <a:ea typeface="ＭＳ 明朝" panose="02020609040205080304" pitchFamily="17" charset="-128"/>
                                 <a:cs typeface="Times New Roman" panose="02020603050405020304" pitchFamily="18" charset="0"/>
@@ -6077,6 +6208,9 @@
                     <m:r>
                       <a:rPr lang="en-US" altLang="ja-JP" sz="2400" i="1">
                         <a:effectLst/>
+                        <a:highlight>
+                          <a:srgbClr val="00FFFF"/>
+                        </a:highlight>
                         <a:latin typeface="Cambria Math" panose="02040503050406030204" pitchFamily="18" charset="0"/>
                         <a:ea typeface="ＭＳ 明朝" panose="02020609040205080304" pitchFamily="17" charset="-128"/>
                         <a:cs typeface="Times New Roman" panose="02020603050405020304" pitchFamily="18" charset="0"/>
@@ -6087,6 +6221,9 @@
                 </a14:m>
                 <a:endParaRPr lang="en-US" altLang="ja-JP" sz="2400" dirty="0">
                   <a:effectLst/>
+                  <a:highlight>
+                    <a:srgbClr val="00FFFF"/>
+                  </a:highlight>
                   <a:latin typeface="Century" panose="02040604050505020304" pitchFamily="18" charset="0"/>
                   <a:ea typeface="ＭＳ 明朝" panose="02020609040205080304" pitchFamily="17" charset="-128"/>
                   <a:cs typeface="Times New Roman" panose="02020603050405020304" pitchFamily="18" charset="0"/>
@@ -6245,6 +6382,9 @@
                         <m:ctrlPr>
                           <a:rPr lang="ja-JP" altLang="ja-JP" sz="3600" i="1">
                             <a:effectLst/>
+                            <a:highlight>
+                              <a:srgbClr val="FFFF00"/>
+                            </a:highlight>
                             <a:latin typeface="Cambria Math" panose="02040503050406030204" pitchFamily="18" charset="0"/>
                             <a:ea typeface="Cambria Math" panose="02040503050406030204" pitchFamily="18" charset="0"/>
                           </a:rPr>
@@ -6254,6 +6394,9 @@
                         <m:r>
                           <a:rPr lang="en-US" altLang="ja-JP" sz="2400" i="1">
                             <a:effectLst/>
+                            <a:highlight>
+                              <a:srgbClr val="FFFF00"/>
+                            </a:highlight>
                             <a:latin typeface="Cambria Math" panose="02040503050406030204" pitchFamily="18" charset="0"/>
                             <a:ea typeface="ＭＳ 明朝" panose="02020609040205080304" pitchFamily="17" charset="-128"/>
                             <a:cs typeface="Times New Roman" panose="02020603050405020304" pitchFamily="18" charset="0"/>
@@ -6265,6 +6408,9 @@
                         <m:r>
                           <a:rPr lang="en-US" altLang="ja-JP" sz="2400" i="1">
                             <a:effectLst/>
+                            <a:highlight>
+                              <a:srgbClr val="FFFF00"/>
+                            </a:highlight>
                             <a:latin typeface="Cambria Math" panose="02040503050406030204" pitchFamily="18" charset="0"/>
                             <a:ea typeface="ＭＳ 明朝" panose="02020609040205080304" pitchFamily="17" charset="-128"/>
                             <a:cs typeface="Times New Roman" panose="02020603050405020304" pitchFamily="18" charset="0"/>
@@ -6392,7 +6538,19 @@
                         <a:ea typeface="ＭＳ 明朝" panose="02020609040205080304" pitchFamily="17" charset="-128"/>
                         <a:cs typeface="Times New Roman" panose="02020603050405020304" pitchFamily="18" charset="0"/>
                       </a:rPr>
-                      <m:t>&lt;1.25</m:t>
+                      <m:t>&lt;</m:t>
+                    </m:r>
+                    <m:r>
+                      <a:rPr lang="en-US" altLang="ja-JP" sz="2400" i="1">
+                        <a:effectLst/>
+                        <a:highlight>
+                          <a:srgbClr val="00FFFF"/>
+                        </a:highlight>
+                        <a:latin typeface="Cambria Math" panose="02040503050406030204" pitchFamily="18" charset="0"/>
+                        <a:ea typeface="ＭＳ 明朝" panose="02020609040205080304" pitchFamily="17" charset="-128"/>
+                        <a:cs typeface="Times New Roman" panose="02020603050405020304" pitchFamily="18" charset="0"/>
+                      </a:rPr>
+                      <m:t>1.25</m:t>
                     </m:r>
                   </m:oMath>
                 </a14:m>
@@ -6990,11 +7148,23 @@
                 <a:r>
                   <a:rPr lang="ja-JP" altLang="ja-JP" sz="2400" b="1" dirty="0">
                     <a:effectLst/>
+                    <a:highlight>
+                      <a:srgbClr val="FF00FF"/>
+                    </a:highlight>
                     <a:latin typeface="Century" panose="02040604050505020304" pitchFamily="18" charset="0"/>
                     <a:ea typeface="ＭＳ 明朝" panose="02020609040205080304" pitchFamily="17" charset="-128"/>
                     <a:cs typeface="Times New Roman" panose="02020603050405020304" pitchFamily="18" charset="0"/>
                   </a:rPr>
-                  <a:t>貿易の三角形（</a:t>
+                  <a:t>貿易の三角形</a:t>
+                </a:r>
+                <a:r>
+                  <a:rPr lang="ja-JP" altLang="ja-JP" sz="2400" b="1" dirty="0">
+                    <a:effectLst/>
+                    <a:latin typeface="Century" panose="02040604050505020304" pitchFamily="18" charset="0"/>
+                    <a:ea typeface="ＭＳ 明朝" panose="02020609040205080304" pitchFamily="17" charset="-128"/>
+                    <a:cs typeface="Times New Roman" panose="02020603050405020304" pitchFamily="18" charset="0"/>
+                  </a:rPr>
+                  <a:t>（</a:t>
                 </a:r>
                 <a:r>
                   <a:rPr lang="en-US" altLang="ja-JP" sz="2400" b="1" dirty="0">
@@ -7073,7 +7243,7 @@
             </p:txBody>
           </p:sp>
         </mc:Choice>
-        <mc:Fallback xmlns="">
+        <mc:Fallback>
           <p:sp>
             <p:nvSpPr>
               <p:cNvPr id="3" name="コンテンツ プレースホルダー 2">
@@ -7107,7 +7277,7 @@
               <a:lstStyle/>
               <a:p>
                 <a:r>
-                  <a:rPr lang="en-JP">
+                  <a:rPr lang="ja-JP" altLang="en-US">
                     <a:noFill/>
                   </a:rPr>
                   <a:t> </a:t>
@@ -14112,7 +14282,7 @@
           <p:nvPr>
             <p:extLst>
               <p:ext uri="{D42A27DB-BD31-4B8C-83A1-F6EECF244321}">
-                <p14:modId xmlns:p14="http://schemas.microsoft.com/office/powerpoint/2010/main" val="1405257177"/>
+                <p14:modId xmlns:p14="http://schemas.microsoft.com/office/powerpoint/2010/main" val="85253235"/>
               </p:ext>
             </p:extLst>
           </p:nvPr>
@@ -14214,9 +14384,14 @@
                     <a:lstStyle/>
                     <a:p>
                       <a:r>
-                        <a:rPr lang="en-JP" dirty="0"/>
+                        <a:rPr lang="en-JP"/>
                         <a:t>2</a:t>
                       </a:r>
+                      <a:r>
+                        <a:rPr lang="ja-JP" altLang="en-US"/>
+                        <a:t>人</a:t>
+                      </a:r>
+                      <a:endParaRPr lang="en-JP" dirty="0"/>
                     </a:p>
                   </a:txBody>
                   <a:tcPr/>
@@ -14227,9 +14402,14 @@
                     <a:lstStyle/>
                     <a:p>
                       <a:r>
-                        <a:rPr lang="en-JP" dirty="0"/>
+                        <a:rPr lang="en-JP"/>
                         <a:t>10</a:t>
                       </a:r>
+                      <a:r>
+                        <a:rPr lang="ja-JP" altLang="en-US"/>
+                        <a:t>人</a:t>
+                      </a:r>
+                      <a:endParaRPr lang="en-JP" dirty="0"/>
                     </a:p>
                   </a:txBody>
                   <a:tcPr/>
@@ -14260,9 +14440,14 @@
                     <a:lstStyle/>
                     <a:p>
                       <a:r>
-                        <a:rPr lang="en-JP" dirty="0"/>
+                        <a:rPr lang="en-JP"/>
                         <a:t>4</a:t>
                       </a:r>
+                      <a:r>
+                        <a:rPr lang="ja-JP" altLang="en-US"/>
+                        <a:t>人</a:t>
+                      </a:r>
+                      <a:endParaRPr lang="en-JP" dirty="0"/>
                     </a:p>
                   </a:txBody>
                   <a:tcPr/>
@@ -14273,9 +14458,14 @@
                     <a:lstStyle/>
                     <a:p>
                       <a:r>
-                        <a:rPr lang="en-JP" dirty="0"/>
+                        <a:rPr lang="en-JP"/>
                         <a:t>8</a:t>
                       </a:r>
+                      <a:r>
+                        <a:rPr lang="ja-JP" altLang="en-US"/>
+                        <a:t>人</a:t>
+                      </a:r>
+                      <a:endParaRPr lang="en-JP" dirty="0"/>
                     </a:p>
                   </a:txBody>
                   <a:tcPr/>
@@ -14419,14 +14609,14 @@
           <p:nvPr>
             <p:extLst>
               <p:ext uri="{D42A27DB-BD31-4B8C-83A1-F6EECF244321}">
-                <p14:modId xmlns:p14="http://schemas.microsoft.com/office/powerpoint/2010/main" val="678082081"/>
+                <p14:modId xmlns:p14="http://schemas.microsoft.com/office/powerpoint/2010/main" val="1141557670"/>
               </p:ext>
             </p:extLst>
           </p:nvPr>
         </p:nvGraphicFramePr>
         <p:xfrm>
-          <a:off x="269967" y="3522037"/>
-          <a:ext cx="11660776" cy="2301051"/>
+          <a:off x="258415" y="3473920"/>
+          <a:ext cx="11660776" cy="2760337"/>
         </p:xfrm>
         <a:graphic>
           <a:graphicData uri="http://schemas.openxmlformats.org/drawingml/2006/table">
@@ -14522,14 +14712,46 @@
                     <a:lstStyle/>
                     <a:p>
                       <a:r>
+                        <a:rPr lang="en-JP" sz="3200" dirty="0">
+                          <a:highlight>
+                            <a:srgbClr val="FF0000"/>
+                          </a:highlight>
+                        </a:rPr>
+                        <a:t>2</a:t>
+                      </a:r>
+                      <a:r>
                         <a:rPr lang="en-JP" sz="3200" dirty="0"/>
-                        <a:t>2/4=0.5</a:t>
+                        <a:t>/</a:t>
+                      </a:r>
+                      <a:r>
+                        <a:rPr lang="en-JP" sz="3200" dirty="0">
+                          <a:highlight>
+                            <a:srgbClr val="FFFF00"/>
+                          </a:highlight>
+                        </a:rPr>
+                        <a:t>4</a:t>
+                      </a:r>
+                      <a:r>
+                        <a:rPr lang="en-JP" sz="3200" dirty="0"/>
+                        <a:t>=0.5</a:t>
                       </a:r>
                       <a:r>
                         <a:rPr lang="ja-JP" altLang="en-US" sz="3200"/>
                         <a:t>個のバナナ</a:t>
                       </a:r>
-                      <a:endParaRPr lang="en-JP" sz="3200" dirty="0"/>
+                      <a:r>
+                        <a:rPr lang="ja-JP" altLang="en-US" sz="3200">
+                          <a:highlight>
+                            <a:srgbClr val="FFFF00"/>
+                          </a:highlight>
+                        </a:rPr>
+                        <a:t>犠牲</a:t>
+                      </a:r>
+                      <a:endParaRPr lang="en-JP" sz="3200" dirty="0">
+                        <a:highlight>
+                          <a:srgbClr val="FFFF00"/>
+                        </a:highlight>
+                      </a:endParaRPr>
                     </a:p>
                   </a:txBody>
                   <a:tcPr/>
@@ -14557,14 +14779,46 @@
                         <a:defRPr/>
                       </a:pPr>
                       <a:r>
+                        <a:rPr lang="en-JP" sz="3200" dirty="0">
+                          <a:highlight>
+                            <a:srgbClr val="FF0000"/>
+                          </a:highlight>
+                        </a:rPr>
+                        <a:t>10</a:t>
+                      </a:r>
+                      <a:r>
                         <a:rPr lang="en-JP" sz="3200" dirty="0"/>
-                        <a:t>10/8=1.25</a:t>
+                        <a:t>/</a:t>
+                      </a:r>
+                      <a:r>
+                        <a:rPr lang="en-JP" sz="3200" dirty="0">
+                          <a:highlight>
+                            <a:srgbClr val="FFFF00"/>
+                          </a:highlight>
+                        </a:rPr>
+                        <a:t>8</a:t>
+                      </a:r>
+                      <a:r>
+                        <a:rPr lang="en-JP" sz="3200" dirty="0"/>
+                        <a:t>=1.25</a:t>
                       </a:r>
                       <a:r>
                         <a:rPr lang="ja-JP" altLang="en-US" sz="3200"/>
                         <a:t>個のバナナ</a:t>
                       </a:r>
-                      <a:endParaRPr lang="en-JP" sz="3200" dirty="0"/>
+                      <a:r>
+                        <a:rPr lang="ja-JP" altLang="en-US" sz="3200">
+                          <a:highlight>
+                            <a:srgbClr val="FFFF00"/>
+                          </a:highlight>
+                        </a:rPr>
+                        <a:t>犠牲</a:t>
+                      </a:r>
+                      <a:endParaRPr lang="en-JP" sz="3200" dirty="0">
+                        <a:highlight>
+                          <a:srgbClr val="FFFF00"/>
+                        </a:highlight>
+                      </a:endParaRPr>
                     </a:p>
                   </a:txBody>
                   <a:tcPr/>
@@ -14613,12 +14867,32 @@
                         <a:defRPr/>
                       </a:pPr>
                       <a:r>
+                        <a:rPr lang="en-JP" sz="3200" dirty="0">
+                          <a:highlight>
+                            <a:srgbClr val="FFFF00"/>
+                          </a:highlight>
+                        </a:rPr>
+                        <a:t>4</a:t>
+                      </a:r>
+                      <a:r>
                         <a:rPr lang="en-JP" sz="3200" dirty="0"/>
-                        <a:t>4/2=2</a:t>
+                        <a:t>/</a:t>
+                      </a:r>
+                      <a:r>
+                        <a:rPr lang="en-JP" sz="3200" dirty="0">
+                          <a:highlight>
+                            <a:srgbClr val="FF0000"/>
+                          </a:highlight>
+                        </a:rPr>
+                        <a:t>2</a:t>
+                      </a:r>
+                      <a:r>
+                        <a:rPr lang="en-JP" sz="3200" dirty="0"/>
+                        <a:t>=2</a:t>
                       </a:r>
                       <a:r>
                         <a:rPr lang="ja-JP" altLang="en-US" sz="3200"/>
-                        <a:t>個のリンゴ</a:t>
+                        <a:t>個のリンゴ犠牲</a:t>
                       </a:r>
                       <a:endParaRPr lang="en-JP" sz="3200" dirty="0"/>
                     </a:p>
@@ -14631,12 +14905,32 @@
                     <a:lstStyle/>
                     <a:p>
                       <a:r>
+                        <a:rPr lang="en-JP" sz="3200" dirty="0">
+                          <a:highlight>
+                            <a:srgbClr val="FFFF00"/>
+                          </a:highlight>
+                        </a:rPr>
+                        <a:t>8</a:t>
+                      </a:r>
+                      <a:r>
                         <a:rPr lang="en-JP" sz="3200" dirty="0"/>
-                        <a:t>8/10=0.8</a:t>
+                        <a:t>/</a:t>
+                      </a:r>
+                      <a:r>
+                        <a:rPr lang="en-JP" sz="3200" dirty="0">
+                          <a:highlight>
+                            <a:srgbClr val="FF0000"/>
+                          </a:highlight>
+                        </a:rPr>
+                        <a:t>10</a:t>
+                      </a:r>
+                      <a:r>
+                        <a:rPr lang="en-JP" sz="3200" dirty="0"/>
+                        <a:t>=0.8</a:t>
                       </a:r>
                       <a:r>
                         <a:rPr lang="ja-JP" altLang="en-US" sz="3200"/>
-                        <a:t>個のリンゴ</a:t>
+                        <a:t>個のリンゴ犠牲</a:t>
                       </a:r>
                       <a:endParaRPr lang="en-JP" sz="3200" dirty="0"/>
                     </a:p>
@@ -14803,8 +15097,8 @@
         </p:nvSpPr>
         <p:spPr>
           <a:xfrm>
-            <a:off x="2883416" y="3967593"/>
-            <a:ext cx="2359144" cy="842259"/>
+            <a:off x="1978329" y="3935838"/>
+            <a:ext cx="3930887" cy="1184557"/>
           </a:xfrm>
           <a:prstGeom prst="ellipse">
             <a:avLst/>
@@ -14849,8 +15143,8 @@
         </p:nvSpPr>
         <p:spPr>
           <a:xfrm>
-            <a:off x="7394351" y="4672562"/>
-            <a:ext cx="2803386" cy="842259"/>
+            <a:off x="6282784" y="5049700"/>
+            <a:ext cx="4514170" cy="1184557"/>
           </a:xfrm>
           <a:prstGeom prst="ellipse">
             <a:avLst/>
@@ -14896,7 +15190,7 @@
           <p:nvPr>
             <p:extLst>
               <p:ext uri="{D42A27DB-BD31-4B8C-83A1-F6EECF244321}">
-                <p14:modId xmlns:p14="http://schemas.microsoft.com/office/powerpoint/2010/main" val="2631978451"/>
+                <p14:modId xmlns:p14="http://schemas.microsoft.com/office/powerpoint/2010/main" val="3695703857"/>
               </p:ext>
             </p:extLst>
           </p:nvPr>
@@ -14998,9 +15292,26 @@
                     <a:lstStyle/>
                     <a:p>
                       <a:r>
-                        <a:rPr lang="en-JP" dirty="0"/>
+                        <a:rPr lang="en-JP">
+                          <a:highlight>
+                            <a:srgbClr val="FF0000"/>
+                          </a:highlight>
+                        </a:rPr>
                         <a:t>2</a:t>
                       </a:r>
+                      <a:r>
+                        <a:rPr lang="ja-JP" altLang="en-US">
+                          <a:highlight>
+                            <a:srgbClr val="FF0000"/>
+                          </a:highlight>
+                        </a:rPr>
+                        <a:t>人</a:t>
+                      </a:r>
+                      <a:endParaRPr lang="en-JP" dirty="0">
+                        <a:highlight>
+                          <a:srgbClr val="FF0000"/>
+                        </a:highlight>
+                      </a:endParaRPr>
                     </a:p>
                   </a:txBody>
                   <a:tcPr/>
@@ -15011,7 +15322,11 @@
                     <a:lstStyle/>
                     <a:p>
                       <a:r>
-                        <a:rPr lang="en-JP" dirty="0"/>
+                        <a:rPr lang="en-JP" dirty="0">
+                          <a:highlight>
+                            <a:srgbClr val="FF0000"/>
+                          </a:highlight>
+                        </a:rPr>
                         <a:t>10</a:t>
                       </a:r>
                     </a:p>
@@ -15044,9 +15359,26 @@
                     <a:lstStyle/>
                     <a:p>
                       <a:r>
-                        <a:rPr lang="en-JP" dirty="0"/>
+                        <a:rPr lang="en-JP">
+                          <a:highlight>
+                            <a:srgbClr val="FFFF00"/>
+                          </a:highlight>
+                        </a:rPr>
                         <a:t>4</a:t>
                       </a:r>
+                      <a:r>
+                        <a:rPr lang="ja-JP" altLang="en-US">
+                          <a:highlight>
+                            <a:srgbClr val="FFFF00"/>
+                          </a:highlight>
+                        </a:rPr>
+                        <a:t>人</a:t>
+                      </a:r>
+                      <a:endParaRPr lang="en-JP" dirty="0">
+                        <a:highlight>
+                          <a:srgbClr val="FFFF00"/>
+                        </a:highlight>
+                      </a:endParaRPr>
                     </a:p>
                   </a:txBody>
                   <a:tcPr/>
@@ -15057,7 +15389,11 @@
                     <a:lstStyle/>
                     <a:p>
                       <a:r>
-                        <a:rPr lang="en-JP" dirty="0"/>
+                        <a:rPr lang="en-JP" dirty="0">
+                          <a:highlight>
+                            <a:srgbClr val="FFFF00"/>
+                          </a:highlight>
+                        </a:rPr>
                         <a:t>8</a:t>
                       </a:r>
                     </a:p>
@@ -16061,7 +16397,7 @@
           <p:nvPr>
             <p:extLst>
               <p:ext uri="{D42A27DB-BD31-4B8C-83A1-F6EECF244321}">
-                <p14:modId xmlns:p14="http://schemas.microsoft.com/office/powerpoint/2010/main" val="1429595743"/>
+                <p14:modId xmlns:p14="http://schemas.microsoft.com/office/powerpoint/2010/main" val="529498684"/>
               </p:ext>
             </p:extLst>
           </p:nvPr>
@@ -16242,7 +16578,11 @@
                     <a:lstStyle/>
                     <a:p>
                       <a:r>
-                        <a:rPr lang="en-JP" dirty="0"/>
+                        <a:rPr lang="en-JP" dirty="0">
+                          <a:highlight>
+                            <a:srgbClr val="00FFFF"/>
+                          </a:highlight>
+                        </a:rPr>
                         <a:t>労働保有量</a:t>
                       </a:r>
                     </a:p>
@@ -16255,9 +16595,26 @@
                     <a:lstStyle/>
                     <a:p>
                       <a:r>
-                        <a:rPr lang="en-JP" dirty="0"/>
+                        <a:rPr lang="en-JP">
+                          <a:highlight>
+                            <a:srgbClr val="00FFFF"/>
+                          </a:highlight>
+                        </a:rPr>
                         <a:t>600</a:t>
                       </a:r>
+                      <a:r>
+                        <a:rPr lang="ja-JP" altLang="en-US">
+                          <a:highlight>
+                            <a:srgbClr val="00FFFF"/>
+                          </a:highlight>
+                        </a:rPr>
+                        <a:t>人</a:t>
+                      </a:r>
+                      <a:endParaRPr lang="en-JP" dirty="0">
+                        <a:highlight>
+                          <a:srgbClr val="00FFFF"/>
+                        </a:highlight>
+                      </a:endParaRPr>
                     </a:p>
                   </a:txBody>
                   <a:tcPr/>
@@ -16268,9 +16625,26 @@
                     <a:lstStyle/>
                     <a:p>
                       <a:r>
-                        <a:rPr lang="en-JP" dirty="0"/>
+                        <a:rPr lang="en-JP">
+                          <a:highlight>
+                            <a:srgbClr val="00FFFF"/>
+                          </a:highlight>
+                        </a:rPr>
                         <a:t>1800</a:t>
                       </a:r>
+                      <a:r>
+                        <a:rPr lang="ja-JP" altLang="en-US">
+                          <a:highlight>
+                            <a:srgbClr val="00FFFF"/>
+                          </a:highlight>
+                        </a:rPr>
+                        <a:t>人</a:t>
+                      </a:r>
+                      <a:endParaRPr lang="en-JP" dirty="0">
+                        <a:highlight>
+                          <a:srgbClr val="00FFFF"/>
+                        </a:highlight>
+                      </a:endParaRPr>
                     </a:p>
                   </a:txBody>
                   <a:tcPr/>
@@ -16355,7 +16729,7 @@
           <p:nvPr>
             <p:extLst>
               <p:ext uri="{D42A27DB-BD31-4B8C-83A1-F6EECF244321}">
-                <p14:modId xmlns:p14="http://schemas.microsoft.com/office/powerpoint/2010/main" val="3985136327"/>
+                <p14:modId xmlns:p14="http://schemas.microsoft.com/office/powerpoint/2010/main" val="3709360660"/>
               </p:ext>
             </p:extLst>
           </p:nvPr>
@@ -16457,9 +16831,22 @@
                     <a:lstStyle/>
                     <a:p>
                       <a:r>
-                        <a:rPr lang="en-JP" dirty="0"/>
+                        <a:rPr lang="en-JP"/>
                         <a:t>100個</a:t>
                       </a:r>
+                      <a:r>
+                        <a:rPr lang="ja-JP" altLang="en-US"/>
+                        <a:t>（</a:t>
+                      </a:r>
+                      <a:r>
+                        <a:rPr lang="en-US" altLang="ja-JP" dirty="0"/>
+                        <a:t>x</a:t>
+                      </a:r>
+                      <a:r>
+                        <a:rPr lang="ja-JP" altLang="en-US"/>
+                        <a:t>）</a:t>
+                      </a:r>
+                      <a:endParaRPr lang="en-JP" dirty="0"/>
                     </a:p>
                   </a:txBody>
                   <a:tcPr/>
@@ -16537,9 +16924,22 @@
                         <a:defRPr/>
                       </a:pPr>
                       <a:r>
-                        <a:rPr lang="en-JP" dirty="0"/>
+                        <a:rPr lang="en-JP"/>
                         <a:t>100個</a:t>
                       </a:r>
+                      <a:r>
+                        <a:rPr lang="ja-JP" altLang="en-US"/>
+                        <a:t>（</a:t>
+                      </a:r>
+                      <a:r>
+                        <a:rPr lang="en-US" altLang="ja-JP" dirty="0"/>
+                        <a:t>y</a:t>
+                      </a:r>
+                      <a:r>
+                        <a:rPr lang="ja-JP" altLang="en-US"/>
+                        <a:t>）</a:t>
+                      </a:r>
+                      <a:endParaRPr lang="en-JP" dirty="0"/>
                     </a:p>
                   </a:txBody>
                   <a:tcPr/>
@@ -17426,8 +17826,8 @@
           </p:graphicFrame>
         </mc:Fallback>
       </mc:AlternateContent>
-      <mc:AlternateContent xmlns:mc="http://schemas.openxmlformats.org/markup-compatibility/2006" xmlns:a14="http://schemas.microsoft.com/office/drawing/2010/main">
-        <mc:Choice Requires="a14">
+      <mc:AlternateContent xmlns:mc="http://schemas.openxmlformats.org/markup-compatibility/2006">
+        <mc:Choice xmlns:a14="http://schemas.microsoft.com/office/drawing/2010/main" Requires="a14">
           <p:sp>
             <p:nvSpPr>
               <p:cNvPr id="4" name="TextBox 3">
@@ -17471,6 +17871,9 @@
                       </m:r>
                       <m:r>
                         <a:rPr lang="en-US" sz="4000" b="0" i="1" smtClean="0">
+                          <a:highlight>
+                            <a:srgbClr val="FF0000"/>
+                          </a:highlight>
                           <a:latin typeface="Cambria Math" panose="02040503050406030204" pitchFamily="18" charset="0"/>
                         </a:rPr>
                         <m:t>𝑥</m:t>
@@ -17483,6 +17886,9 @@
                       </m:r>
                       <m:r>
                         <a:rPr lang="en-US" sz="4000" b="0" i="1" smtClean="0">
+                          <a:highlight>
+                            <a:srgbClr val="FFFF00"/>
+                          </a:highlight>
                           <a:latin typeface="Cambria Math" panose="02040503050406030204" pitchFamily="18" charset="0"/>
                         </a:rPr>
                         <m:t>𝑦</m:t>
@@ -17501,7 +17907,7 @@
             </p:txBody>
           </p:sp>
         </mc:Choice>
-        <mc:Fallback xmlns="">
+        <mc:Fallback>
           <p:sp>
             <p:nvSpPr>
               <p:cNvPr id="4" name="TextBox 3">
@@ -17527,7 +17933,7 @@
               <a:blipFill>
                 <a:blip r:embed="rId3"/>
                 <a:stretch>
-                  <a:fillRect b="-23214"/>
+                  <a:fillRect b="-14286"/>
                 </a:stretch>
               </a:blipFill>
             </p:spPr>
@@ -17536,7 +17942,7 @@
               <a:lstStyle/>
               <a:p>
                 <a:r>
-                  <a:rPr lang="en-JP">
+                  <a:rPr lang="ja-JP" altLang="en-US">
                     <a:noFill/>
                   </a:rPr>
                   <a:t> </a:t>
@@ -17672,8 +18078,8 @@
           </p:sp>
         </mc:Fallback>
       </mc:AlternateContent>
-      <mc:AlternateContent xmlns:mc="http://schemas.openxmlformats.org/markup-compatibility/2006" xmlns:a14="http://schemas.microsoft.com/office/drawing/2010/main">
-        <mc:Choice Requires="a14">
+      <mc:AlternateContent xmlns:mc="http://schemas.openxmlformats.org/markup-compatibility/2006">
+        <mc:Choice xmlns:a14="http://schemas.microsoft.com/office/drawing/2010/main" Requires="a14">
           <p:sp>
             <p:nvSpPr>
               <p:cNvPr id="9" name="TextBox 8">
@@ -17711,6 +18117,9 @@
                     <m:oMath xmlns:m="http://schemas.openxmlformats.org/officeDocument/2006/math">
                       <m:r>
                         <a:rPr lang="en-US" sz="4000" b="0" i="1" smtClean="0">
+                          <a:highlight>
+                            <a:srgbClr val="FFFF00"/>
+                          </a:highlight>
                           <a:latin typeface="Cambria Math" panose="02040503050406030204" pitchFamily="18" charset="0"/>
                         </a:rPr>
                         <m:t>𝑦</m:t>
@@ -17723,6 +18132,9 @@
                       </m:r>
                       <m:r>
                         <a:rPr lang="en-US" sz="4000" b="0" i="1" smtClean="0">
+                          <a:highlight>
+                            <a:srgbClr val="FF0000"/>
+                          </a:highlight>
                           <a:latin typeface="Cambria Math" panose="02040503050406030204" pitchFamily="18" charset="0"/>
                         </a:rPr>
                         <m:t>𝑥</m:t>
@@ -17730,12 +18142,16 @@
                     </m:oMath>
                   </m:oMathPara>
                 </a14:m>
-                <a:endParaRPr lang="en-JP" sz="4000" dirty="0"/>
+                <a:endParaRPr lang="en-JP" sz="4000" dirty="0">
+                  <a:highlight>
+                    <a:srgbClr val="FF0000"/>
+                  </a:highlight>
+                </a:endParaRPr>
               </a:p>
             </p:txBody>
           </p:sp>
         </mc:Choice>
-        <mc:Fallback xmlns="">
+        <mc:Fallback>
           <p:sp>
             <p:nvSpPr>
               <p:cNvPr id="9" name="TextBox 8">
@@ -17770,7 +18186,7 @@
               <a:lstStyle/>
               <a:p>
                 <a:r>
-                  <a:rPr lang="en-JP">
+                  <a:rPr lang="ja-JP" altLang="en-US">
                     <a:noFill/>
                   </a:rPr>
                   <a:t> </a:t>
@@ -18573,6 +18989,41 @@
           </a:p>
         </p:txBody>
       </p:sp>
+      <p:sp>
+        <p:nvSpPr>
+          <p:cNvPr id="3" name="テキスト ボックス 2">
+            <a:extLst>
+              <a:ext uri="{FF2B5EF4-FFF2-40B4-BE49-F238E27FC236}">
+                <a16:creationId xmlns:a16="http://schemas.microsoft.com/office/drawing/2014/main" id="{A754CEE4-2719-BFC2-EADF-B000D7EB41A9}"/>
+              </a:ext>
+            </a:extLst>
+          </p:cNvPr>
+          <p:cNvSpPr txBox="1"/>
+          <p:nvPr/>
+        </p:nvSpPr>
+        <p:spPr>
+          <a:xfrm>
+            <a:off x="4825590" y="6262713"/>
+            <a:ext cx="1107996" cy="369332"/>
+          </a:xfrm>
+          <a:prstGeom prst="rect">
+            <a:avLst/>
+          </a:prstGeom>
+          <a:noFill/>
+        </p:spPr>
+        <p:txBody>
+          <a:bodyPr wrap="none" rtlCol="0">
+            <a:spAutoFit/>
+          </a:bodyPr>
+          <a:lstStyle/>
+          <a:p>
+            <a:r>
+              <a:rPr kumimoji="1" lang="ja-JP" altLang="en-US" b="1"/>
+              <a:t>機会費用</a:t>
+            </a:r>
+          </a:p>
+        </p:txBody>
+      </p:sp>
     </p:spTree>
     <p:extLst>
       <p:ext uri="{BB962C8B-B14F-4D97-AF65-F5344CB8AC3E}">
@@ -18705,7 +19156,11 @@
           <a:prstGeom prst="line">
             <a:avLst/>
           </a:prstGeom>
-          <a:ln w="38100"/>
+          <a:ln w="38100">
+            <a:solidFill>
+              <a:srgbClr val="FF0000"/>
+            </a:solidFill>
+          </a:ln>
         </p:spPr>
         <p:style>
           <a:lnRef idx="1">
@@ -18886,7 +19341,7 @@
         </p:nvSpPr>
         <p:spPr>
           <a:xfrm>
-            <a:off x="7474516" y="4530151"/>
+            <a:off x="7452734" y="4624387"/>
             <a:ext cx="1005403" cy="584775"/>
           </a:xfrm>
           <a:prstGeom prst="rect">
@@ -18901,7 +19356,11 @@
           <a:lstStyle/>
           <a:p>
             <a:r>
-              <a:rPr lang="en-JP" sz="3200" dirty="0"/>
+              <a:rPr lang="en-JP" sz="3200" dirty="0">
+                <a:solidFill>
+                  <a:srgbClr val="FF0000"/>
+                </a:solidFill>
+              </a:rPr>
               <a:t>日本</a:t>
             </a:r>
           </a:p>
@@ -19047,7 +19506,7 @@
           </a:prstGeom>
           <a:ln w="38100">
             <a:solidFill>
-              <a:schemeClr val="accent6"/>
+              <a:srgbClr val="FFFF00"/>
             </a:solidFill>
           </a:ln>
         </p:spPr>
@@ -19095,10 +19554,18 @@
           <a:lstStyle/>
           <a:p>
             <a:r>
-              <a:rPr lang="ja-JP" altLang="en-US" sz="3200"/>
+              <a:rPr lang="ja-JP" altLang="en-US" sz="3200">
+                <a:solidFill>
+                  <a:srgbClr val="FFFF00"/>
+                </a:solidFill>
+              </a:rPr>
               <a:t>フィリピン</a:t>
             </a:r>
-            <a:endParaRPr lang="en-JP" sz="3200" dirty="0"/>
+            <a:endParaRPr lang="en-JP" sz="3200" dirty="0">
+              <a:solidFill>
+                <a:srgbClr val="FFFF00"/>
+              </a:solidFill>
+            </a:endParaRPr>
           </a:p>
         </p:txBody>
       </p:sp>
@@ -20740,13 +21207,13 @@
           <p:nvPr>
             <p:extLst>
               <p:ext uri="{D42A27DB-BD31-4B8C-83A1-F6EECF244321}">
-                <p14:modId xmlns:p14="http://schemas.microsoft.com/office/powerpoint/2010/main" val="1002770801"/>
+                <p14:modId xmlns:p14="http://schemas.microsoft.com/office/powerpoint/2010/main" val="2366048050"/>
               </p:ext>
             </p:extLst>
           </p:nvPr>
         </p:nvGraphicFramePr>
         <p:xfrm>
-          <a:off x="7305596" y="3227860"/>
+          <a:off x="7253316" y="3217010"/>
           <a:ext cx="3694908" cy="1463040"/>
         </p:xfrm>
         <a:graphic>
@@ -21028,13 +21495,13 @@
           <p:nvPr>
             <p:extLst>
               <p:ext uri="{D42A27DB-BD31-4B8C-83A1-F6EECF244321}">
-                <p14:modId xmlns:p14="http://schemas.microsoft.com/office/powerpoint/2010/main" val="2984284680"/>
+                <p14:modId xmlns:p14="http://schemas.microsoft.com/office/powerpoint/2010/main" val="1199928067"/>
               </p:ext>
             </p:extLst>
           </p:nvPr>
         </p:nvGraphicFramePr>
         <p:xfrm>
-          <a:off x="7305596" y="5163413"/>
+          <a:off x="7229395" y="5203258"/>
           <a:ext cx="3694908" cy="1463040"/>
         </p:xfrm>
         <a:graphic>
@@ -21430,7 +21897,7 @@
         </p:nvCxnSpPr>
         <p:spPr>
           <a:xfrm>
-            <a:off x="9100771" y="5894933"/>
+            <a:off x="9063234" y="5897834"/>
             <a:ext cx="334172" cy="0"/>
           </a:xfrm>
           <a:prstGeom prst="straightConnector1">
